--- a/presentation/Science_day_HSRM/fig/!abb.pptx
+++ b/presentation/Science_day_HSRM/fig/!abb.pptx
@@ -7,6 +7,7 @@
   <p:sldIdLst>
     <p:sldId id="256" r:id="rId5"/>
     <p:sldId id="257" r:id="rId6"/>
+    <p:sldId id="258" r:id="rId7"/>
   </p:sldIdLst>
   <p:sldSz cx="12192000" cy="6858000"/>
   <p:notesSz cx="6858000" cy="9144000"/>
@@ -105,15 +106,12 @@
       </a:defRPr>
     </a:lvl9pPr>
   </p:defaultTextStyle>
+  <p:extLst>
+    <p:ext uri="{EFAFB233-063F-42B5-8137-9DF3F51BA10A}">
+      <p15:sldGuideLst xmlns:p15="http://schemas.microsoft.com/office/powerpoint/2012/main"/>
+    </p:ext>
+  </p:extLst>
 </p:presentation>
-</file>
-
-<file path=ppt/revisionInfo.xml><?xml version="1.0" encoding="utf-8"?>
-<p1510:revInfo xmlns:a="http://schemas.openxmlformats.org/drawingml/2006/main" xmlns:r="http://schemas.openxmlformats.org/officeDocument/2006/relationships" xmlns:p1510="http://schemas.microsoft.com/office/powerpoint/2015/10/main">
-  <p1510:revLst>
-    <p1510:client id="{6494D60B-5470-4498-9EA0-36329373D7A3}" v="1" dt="2026-04-26T18:03:07.353"/>
-  </p1510:revLst>
-</p1510:revInfo>
 </file>
 
 <file path=ppt/changesInfos/changesInfo1.xml><?xml version="1.0" encoding="utf-8"?>
@@ -121,37 +119,46 @@
   <pc:docChgLst>
     <pc:chgData name="Kirschstein, Thomas" userId="919c7545-f9ae-4451-a4d1-28753b1796cc" providerId="ADAL" clId="{8178FA0C-3989-435F-A6B7-56D41B4E769F}"/>
     <pc:docChg chg="addSld modSld">
-      <pc:chgData name="Kirschstein, Thomas" userId="919c7545-f9ae-4451-a4d1-28753b1796cc" providerId="ADAL" clId="{8178FA0C-3989-435F-A6B7-56D41B4E769F}" dt="2026-04-26T18:40:49.438" v="4" actId="962"/>
+      <pc:chgData name="Kirschstein, Thomas" userId="919c7545-f9ae-4451-a4d1-28753b1796cc" providerId="ADAL" clId="{8178FA0C-3989-435F-A6B7-56D41B4E769F}" dt="2026-06-11T18:12:09.905" v="172" actId="1035"/>
       <pc:docMkLst>
         <pc:docMk/>
       </pc:docMkLst>
-      <pc:sldChg chg="modSp">
-        <pc:chgData name="Kirschstein, Thomas" userId="919c7545-f9ae-4451-a4d1-28753b1796cc" providerId="ADAL" clId="{8178FA0C-3989-435F-A6B7-56D41B4E769F}" dt="2026-04-26T18:03:07.353" v="0"/>
+      <pc:sldChg chg="addSp delSp modSp new mod">
+        <pc:chgData name="Kirschstein, Thomas" userId="919c7545-f9ae-4451-a4d1-28753b1796cc" providerId="ADAL" clId="{8178FA0C-3989-435F-A6B7-56D41B4E769F}" dt="2026-06-11T18:12:09.905" v="172" actId="1035"/>
         <pc:sldMkLst>
           <pc:docMk/>
-          <pc:sldMk cId="918184282" sldId="256"/>
+          <pc:sldMk cId="364873397" sldId="258"/>
         </pc:sldMkLst>
-        <pc:picChg chg="mod">
-          <ac:chgData name="Kirschstein, Thomas" userId="919c7545-f9ae-4451-a4d1-28753b1796cc" providerId="ADAL" clId="{8178FA0C-3989-435F-A6B7-56D41B4E769F}" dt="2026-04-26T18:03:07.353" v="0"/>
+        <pc:spChg chg="del">
+          <ac:chgData name="Kirschstein, Thomas" userId="919c7545-f9ae-4451-a4d1-28753b1796cc" providerId="ADAL" clId="{8178FA0C-3989-435F-A6B7-56D41B4E769F}" dt="2026-06-11T18:10:47.435" v="7"/>
+          <ac:spMkLst>
+            <pc:docMk/>
+            <pc:sldMk cId="364873397" sldId="258"/>
+            <ac:spMk id="3" creationId="{433CBF3A-B2BC-4F38-3AF6-D6ADD56F7001}"/>
+          </ac:spMkLst>
+        </pc:spChg>
+        <pc:picChg chg="add mod ord">
+          <ac:chgData name="Kirschstein, Thomas" userId="919c7545-f9ae-4451-a4d1-28753b1796cc" providerId="ADAL" clId="{8178FA0C-3989-435F-A6B7-56D41B4E769F}" dt="2026-06-11T18:12:09.905" v="172" actId="1035"/>
           <ac:picMkLst>
             <pc:docMk/>
-            <pc:sldMk cId="918184282" sldId="256"/>
-            <ac:picMk id="6" creationId="{E91A49F8-70CC-F3C8-807F-8E6736089FBB}"/>
+            <pc:sldMk cId="364873397" sldId="258"/>
+            <ac:picMk id="5" creationId="{7A1C7EA3-FC60-A918-A563-AE4DEC0AD01D}"/>
           </ac:picMkLst>
         </pc:picChg>
-      </pc:sldChg>
-      <pc:sldChg chg="addSp modSp new mod">
-        <pc:chgData name="Kirschstein, Thomas" userId="919c7545-f9ae-4451-a4d1-28753b1796cc" providerId="ADAL" clId="{8178FA0C-3989-435F-A6B7-56D41B4E769F}" dt="2026-04-26T18:40:49.438" v="4" actId="962"/>
-        <pc:sldMkLst>
-          <pc:docMk/>
-          <pc:sldMk cId="629928326" sldId="257"/>
-        </pc:sldMkLst>
         <pc:picChg chg="add mod">
-          <ac:chgData name="Kirschstein, Thomas" userId="919c7545-f9ae-4451-a4d1-28753b1796cc" providerId="ADAL" clId="{8178FA0C-3989-435F-A6B7-56D41B4E769F}" dt="2026-04-26T18:40:49.438" v="4" actId="962"/>
+          <ac:chgData name="Kirschstein, Thomas" userId="919c7545-f9ae-4451-a4d1-28753b1796cc" providerId="ADAL" clId="{8178FA0C-3989-435F-A6B7-56D41B4E769F}" dt="2026-06-11T18:11:59.171" v="167" actId="14100"/>
           <ac:picMkLst>
             <pc:docMk/>
-            <pc:sldMk cId="629928326" sldId="257"/>
-            <ac:picMk id="5" creationId="{EEF26B18-04BB-6C3C-7645-5F6A2D836F21}"/>
+            <pc:sldMk cId="364873397" sldId="258"/>
+            <ac:picMk id="7" creationId="{9EC2D2EC-EA4F-8FF1-6E60-3BF9A33A0B24}"/>
+          </ac:picMkLst>
+        </pc:picChg>
+        <pc:picChg chg="add mod">
+          <ac:chgData name="Kirschstein, Thomas" userId="919c7545-f9ae-4451-a4d1-28753b1796cc" providerId="ADAL" clId="{8178FA0C-3989-435F-A6B7-56D41B4E769F}" dt="2026-06-11T18:11:42.244" v="98" actId="14100"/>
+          <ac:picMkLst>
+            <pc:docMk/>
+            <pc:sldMk cId="364873397" sldId="258"/>
+            <ac:picMk id="9" creationId="{2BFFA5BB-A5C8-2F4C-184C-44219F41FCEA}"/>
           </ac:picMkLst>
         </pc:picChg>
       </pc:sldChg>
@@ -307,7 +314,7 @@
           <a:p>
             <a:fld id="{D03C3CA0-6C16-4978-9995-9E4B04750984}" type="datetimeFigureOut">
               <a:rPr lang="de-DE" smtClean="0"/>
-              <a:t>26.04.2026</a:t>
+              <a:t>11.06.2026</a:t>
             </a:fld>
             <a:endParaRPr lang="de-DE"/>
           </a:p>
@@ -505,7 +512,7 @@
           <a:p>
             <a:fld id="{D03C3CA0-6C16-4978-9995-9E4B04750984}" type="datetimeFigureOut">
               <a:rPr lang="de-DE" smtClean="0"/>
-              <a:t>26.04.2026</a:t>
+              <a:t>11.06.2026</a:t>
             </a:fld>
             <a:endParaRPr lang="de-DE"/>
           </a:p>
@@ -713,7 +720,7 @@
           <a:p>
             <a:fld id="{D03C3CA0-6C16-4978-9995-9E4B04750984}" type="datetimeFigureOut">
               <a:rPr lang="de-DE" smtClean="0"/>
-              <a:t>26.04.2026</a:t>
+              <a:t>11.06.2026</a:t>
             </a:fld>
             <a:endParaRPr lang="de-DE"/>
           </a:p>
@@ -911,7 +918,7 @@
           <a:p>
             <a:fld id="{D03C3CA0-6C16-4978-9995-9E4B04750984}" type="datetimeFigureOut">
               <a:rPr lang="de-DE" smtClean="0"/>
-              <a:t>26.04.2026</a:t>
+              <a:t>11.06.2026</a:t>
             </a:fld>
             <a:endParaRPr lang="de-DE"/>
           </a:p>
@@ -1186,7 +1193,7 @@
           <a:p>
             <a:fld id="{D03C3CA0-6C16-4978-9995-9E4B04750984}" type="datetimeFigureOut">
               <a:rPr lang="de-DE" smtClean="0"/>
-              <a:t>26.04.2026</a:t>
+              <a:t>11.06.2026</a:t>
             </a:fld>
             <a:endParaRPr lang="de-DE"/>
           </a:p>
@@ -1451,7 +1458,7 @@
           <a:p>
             <a:fld id="{D03C3CA0-6C16-4978-9995-9E4B04750984}" type="datetimeFigureOut">
               <a:rPr lang="de-DE" smtClean="0"/>
-              <a:t>26.04.2026</a:t>
+              <a:t>11.06.2026</a:t>
             </a:fld>
             <a:endParaRPr lang="de-DE"/>
           </a:p>
@@ -1863,7 +1870,7 @@
           <a:p>
             <a:fld id="{D03C3CA0-6C16-4978-9995-9E4B04750984}" type="datetimeFigureOut">
               <a:rPr lang="de-DE" smtClean="0"/>
-              <a:t>26.04.2026</a:t>
+              <a:t>11.06.2026</a:t>
             </a:fld>
             <a:endParaRPr lang="de-DE"/>
           </a:p>
@@ -2004,7 +2011,7 @@
           <a:p>
             <a:fld id="{D03C3CA0-6C16-4978-9995-9E4B04750984}" type="datetimeFigureOut">
               <a:rPr lang="de-DE" smtClean="0"/>
-              <a:t>26.04.2026</a:t>
+              <a:t>11.06.2026</a:t>
             </a:fld>
             <a:endParaRPr lang="de-DE"/>
           </a:p>
@@ -2117,7 +2124,7 @@
           <a:p>
             <a:fld id="{D03C3CA0-6C16-4978-9995-9E4B04750984}" type="datetimeFigureOut">
               <a:rPr lang="de-DE" smtClean="0"/>
-              <a:t>26.04.2026</a:t>
+              <a:t>11.06.2026</a:t>
             </a:fld>
             <a:endParaRPr lang="de-DE"/>
           </a:p>
@@ -2428,7 +2435,7 @@
           <a:p>
             <a:fld id="{D03C3CA0-6C16-4978-9995-9E4B04750984}" type="datetimeFigureOut">
               <a:rPr lang="de-DE" smtClean="0"/>
-              <a:t>26.04.2026</a:t>
+              <a:t>11.06.2026</a:t>
             </a:fld>
             <a:endParaRPr lang="de-DE"/>
           </a:p>
@@ -2716,7 +2723,7 @@
           <a:p>
             <a:fld id="{D03C3CA0-6C16-4978-9995-9E4B04750984}" type="datetimeFigureOut">
               <a:rPr lang="de-DE" smtClean="0"/>
-              <a:t>26.04.2026</a:t>
+              <a:t>11.06.2026</a:t>
             </a:fld>
             <a:endParaRPr lang="de-DE"/>
           </a:p>
@@ -2957,7 +2964,7 @@
           <a:p>
             <a:fld id="{D03C3CA0-6C16-4978-9995-9E4B04750984}" type="datetimeFigureOut">
               <a:rPr lang="de-DE" smtClean="0"/>
-              <a:t>26.04.2026</a:t>
+              <a:t>11.06.2026</a:t>
             </a:fld>
             <a:endParaRPr lang="de-DE"/>
           </a:p>
@@ -4144,6 +4151,171 @@
     <p:extLst>
       <p:ext uri="{BB962C8B-B14F-4D97-AF65-F5344CB8AC3E}">
         <p14:creationId xmlns:p14="http://schemas.microsoft.com/office/powerpoint/2010/main" val="629928326"/>
+      </p:ext>
+    </p:extLst>
+  </p:cSld>
+  <p:clrMapOvr>
+    <a:masterClrMapping/>
+  </p:clrMapOvr>
+</p:sld>
+</file>
+
+<file path=ppt/slides/slide3.xml><?xml version="1.0" encoding="utf-8"?>
+<p:sld xmlns:a="http://schemas.openxmlformats.org/drawingml/2006/main" xmlns:r="http://schemas.openxmlformats.org/officeDocument/2006/relationships" xmlns:p="http://schemas.openxmlformats.org/presentationml/2006/main">
+  <p:cSld>
+    <p:spTree>
+      <p:nvGrpSpPr>
+        <p:cNvPr id="1" name=""/>
+        <p:cNvGrpSpPr/>
+        <p:nvPr/>
+      </p:nvGrpSpPr>
+      <p:grpSpPr>
+        <a:xfrm>
+          <a:off x="0" y="0"/>
+          <a:ext cx="0" cy="0"/>
+          <a:chOff x="0" y="0"/>
+          <a:chExt cx="0" cy="0"/>
+        </a:xfrm>
+      </p:grpSpPr>
+      <p:sp>
+        <p:nvSpPr>
+          <p:cNvPr id="2" name="Titel 1">
+            <a:extLst>
+              <a:ext uri="{FF2B5EF4-FFF2-40B4-BE49-F238E27FC236}">
+                <a16:creationId xmlns:a16="http://schemas.microsoft.com/office/drawing/2014/main" id="{3DB87BAB-0E93-42C6-39F4-2371EC6B662F}"/>
+              </a:ext>
+            </a:extLst>
+          </p:cNvPr>
+          <p:cNvSpPr>
+            <a:spLocks noGrp="1"/>
+          </p:cNvSpPr>
+          <p:nvPr>
+            <p:ph type="title"/>
+          </p:nvPr>
+        </p:nvSpPr>
+        <p:spPr/>
+        <p:txBody>
+          <a:bodyPr/>
+          <a:lstStyle/>
+          <a:p>
+            <a:endParaRPr lang="de-DE"/>
+          </a:p>
+        </p:txBody>
+      </p:sp>
+      <p:pic>
+        <p:nvPicPr>
+          <p:cNvPr id="5" name="Inhaltsplatzhalter 4" descr="DIP&#10;&#10;KI-generierte Inhalte können fehlerhaft sein.">
+            <a:extLst>
+              <a:ext uri="{FF2B5EF4-FFF2-40B4-BE49-F238E27FC236}">
+                <a16:creationId xmlns:a16="http://schemas.microsoft.com/office/drawing/2014/main" id="{7A1C7EA3-FC60-A918-A563-AE4DEC0AD01D}"/>
+              </a:ext>
+            </a:extLst>
+          </p:cNvPr>
+          <p:cNvPicPr>
+            <a:picLocks noGrp="1" noChangeAspect="1"/>
+          </p:cNvPicPr>
+          <p:nvPr>
+            <p:ph idx="1"/>
+          </p:nvPr>
+        </p:nvPicPr>
+        <p:blipFill>
+          <a:blip r:embed="rId2">
+            <a:extLst>
+              <a:ext uri="{28A0092B-C50C-407E-A947-70E740481C1C}">
+                <a14:useLocalDpi xmlns:a14="http://schemas.microsoft.com/office/drawing/2010/main" val="0"/>
+              </a:ext>
+            </a:extLst>
+          </a:blip>
+          <a:stretch>
+            <a:fillRect/>
+          </a:stretch>
+        </p:blipFill>
+        <p:spPr>
+          <a:xfrm>
+            <a:off x="925512" y="2362235"/>
+            <a:ext cx="3267075" cy="1400175"/>
+          </a:xfrm>
+          <a:prstGeom prst="rect">
+            <a:avLst/>
+          </a:prstGeom>
+        </p:spPr>
+      </p:pic>
+      <p:pic>
+        <p:nvPicPr>
+          <p:cNvPr id="7" name="Grafik 6">
+            <a:extLst>
+              <a:ext uri="{FF2B5EF4-FFF2-40B4-BE49-F238E27FC236}">
+                <a16:creationId xmlns:a16="http://schemas.microsoft.com/office/drawing/2014/main" id="{9EC2D2EC-EA4F-8FF1-6E60-3BF9A33A0B24}"/>
+              </a:ext>
+            </a:extLst>
+          </p:cNvPr>
+          <p:cNvPicPr>
+            <a:picLocks noChangeAspect="1"/>
+          </p:cNvPicPr>
+          <p:nvPr/>
+        </p:nvPicPr>
+        <p:blipFill>
+          <a:blip>
+            <a:extLst>
+              <a:ext uri="{96DAC541-7B7A-43D3-8B79-37D633B846F1}">
+                <asvg:svgBlip xmlns:asvg="http://schemas.microsoft.com/office/drawing/2016/SVG/main" r:embed="rId3"/>
+              </a:ext>
+            </a:extLst>
+          </a:blip>
+          <a:stretch>
+            <a:fillRect/>
+          </a:stretch>
+        </p:blipFill>
+        <p:spPr>
+          <a:xfrm>
+            <a:off x="5174460" y="2138363"/>
+            <a:ext cx="3019422" cy="1759706"/>
+          </a:xfrm>
+          <a:prstGeom prst="rect">
+            <a:avLst/>
+          </a:prstGeom>
+        </p:spPr>
+      </p:pic>
+      <p:pic>
+        <p:nvPicPr>
+          <p:cNvPr id="9" name="Grafik 8" descr="#moderndenken.&#10;&#10;KI-generierte Inhalte können fehlerhaft sein.">
+            <a:extLst>
+              <a:ext uri="{FF2B5EF4-FFF2-40B4-BE49-F238E27FC236}">
+                <a16:creationId xmlns:a16="http://schemas.microsoft.com/office/drawing/2014/main" id="{2BFFA5BB-A5C8-2F4C-184C-44219F41FCEA}"/>
+              </a:ext>
+            </a:extLst>
+          </p:cNvPr>
+          <p:cNvPicPr>
+            <a:picLocks noChangeAspect="1"/>
+          </p:cNvPicPr>
+          <p:nvPr/>
+        </p:nvPicPr>
+        <p:blipFill>
+          <a:blip r:embed="rId4">
+            <a:extLst>
+              <a:ext uri="{28A0092B-C50C-407E-A947-70E740481C1C}">
+                <a14:useLocalDpi xmlns:a14="http://schemas.microsoft.com/office/drawing/2010/main" val="0"/>
+              </a:ext>
+            </a:extLst>
+          </a:blip>
+          <a:stretch>
+            <a:fillRect/>
+          </a:stretch>
+        </p:blipFill>
+        <p:spPr>
+          <a:xfrm>
+            <a:off x="8310563" y="2138617"/>
+            <a:ext cx="2380302" cy="1869348"/>
+          </a:xfrm>
+          <a:prstGeom prst="rect">
+            <a:avLst/>
+          </a:prstGeom>
+        </p:spPr>
+      </p:pic>
+    </p:spTree>
+    <p:extLst>
+      <p:ext uri="{BB962C8B-B14F-4D97-AF65-F5344CB8AC3E}">
+        <p14:creationId xmlns:p14="http://schemas.microsoft.com/office/powerpoint/2010/main" val="364873397"/>
       </p:ext>
     </p:extLst>
   </p:cSld>
@@ -4469,27 +4641,6 @@
 </file>
 
 <file path=customXml/item1.xml><?xml version="1.0" encoding="utf-8"?>
-<p:properties xmlns:p="http://schemas.microsoft.com/office/2006/metadata/properties" xmlns:xsi="http://www.w3.org/2001/XMLSchema-instance" xmlns:pc="http://schemas.microsoft.com/office/infopath/2007/PartnerControls">
-  <documentManagement>
-    <Thema xmlns="75a7cc16-a325-42f6-a633-b9d335f46d66" xsi:nil="true"/>
-    <TaxCatchAll xmlns="19ceceb8-c9f0-4d85-b02f-4af4389ce7fe" xsi:nil="true"/>
-    <lcf76f155ced4ddcb4097134ff3c332f xmlns="75a7cc16-a325-42f6-a633-b9d335f46d66">
-      <Terms xmlns="http://schemas.microsoft.com/office/infopath/2007/PartnerControls"/>
-    </lcf76f155ced4ddcb4097134ff3c332f>
-  </documentManagement>
-</p:properties>
-</file>
-
-<file path=customXml/item2.xml><?xml version="1.0" encoding="utf-8"?>
-<?mso-contentType ?>
-<FormTemplates xmlns="http://schemas.microsoft.com/sharepoint/v3/contenttype/forms">
-  <Display>DocumentLibraryForm</Display>
-  <Edit>DocumentLibraryForm</Edit>
-  <New>DocumentLibraryForm</New>
-</FormTemplates>
-</file>
-
-<file path=customXml/item3.xml><?xml version="1.0" encoding="utf-8"?>
 <ct:contentTypeSchema xmlns:ct="http://schemas.microsoft.com/office/2006/metadata/contentType" xmlns:ma="http://schemas.microsoft.com/office/2006/metadata/properties/metaAttributes" ct:_="" ma:_="" ma:contentTypeName="Dokument" ma:contentTypeID="0x010100D9AF034F0B670B4891A61F46F0FD4463" ma:contentTypeVersion="13" ma:contentTypeDescription="Ein neues Dokument erstellen." ma:contentTypeScope="" ma:versionID="702f8338609bb484bdb0ddb8e045398d">
   <xsd:schema xmlns:xsd="http://www.w3.org/2001/XMLSchema" xmlns:xs="http://www.w3.org/2001/XMLSchema" xmlns:p="http://schemas.microsoft.com/office/2006/metadata/properties" xmlns:ns2="75a7cc16-a325-42f6-a633-b9d335f46d66" xmlns:ns3="19ceceb8-c9f0-4d85-b02f-4af4389ce7fe" targetNamespace="http://schemas.microsoft.com/office/2006/metadata/properties" ma:root="true" ma:fieldsID="007b09dd0f1b65eae87cbf249639ae35" ns2:_="" ns3:_="">
     <xsd:import namespace="75a7cc16-a325-42f6-a633-b9d335f46d66"/>
@@ -4698,26 +4849,28 @@
 </ct:contentTypeSchema>
 </file>
 
-<file path=customXml/itemProps1.xml><?xml version="1.0" encoding="utf-8"?>
-<ds:datastoreItem xmlns:ds="http://schemas.openxmlformats.org/officeDocument/2006/customXml" ds:itemID="{21F2C082-E4E9-48CA-A881-0E9B6B53FBD2}">
-  <ds:schemaRefs>
-    <ds:schemaRef ds:uri="http://schemas.microsoft.com/office/2006/metadata/properties"/>
-    <ds:schemaRef ds:uri="http://schemas.microsoft.com/office/infopath/2007/PartnerControls"/>
-    <ds:schemaRef ds:uri="75a7cc16-a325-42f6-a633-b9d335f46d66"/>
-    <ds:schemaRef ds:uri="19ceceb8-c9f0-4d85-b02f-4af4389ce7fe"/>
-  </ds:schemaRefs>
-</ds:datastoreItem>
+<file path=customXml/item2.xml><?xml version="1.0" encoding="utf-8"?>
+<?mso-contentType ?>
+<FormTemplates xmlns="http://schemas.microsoft.com/sharepoint/v3/contenttype/forms">
+  <Display>DocumentLibraryForm</Display>
+  <Edit>DocumentLibraryForm</Edit>
+  <New>DocumentLibraryForm</New>
+</FormTemplates>
 </file>
 
-<file path=customXml/itemProps2.xml><?xml version="1.0" encoding="utf-8"?>
-<ds:datastoreItem xmlns:ds="http://schemas.openxmlformats.org/officeDocument/2006/customXml" ds:itemID="{2904A126-324B-49D2-9297-D489D6A59BE7}">
-  <ds:schemaRefs>
-    <ds:schemaRef ds:uri="http://schemas.microsoft.com/sharepoint/v3/contenttype/forms"/>
-  </ds:schemaRefs>
-</ds:datastoreItem>
+<file path=customXml/item3.xml><?xml version="1.0" encoding="utf-8"?>
+<p:properties xmlns:p="http://schemas.microsoft.com/office/2006/metadata/properties" xmlns:xsi="http://www.w3.org/2001/XMLSchema-instance" xmlns:pc="http://schemas.microsoft.com/office/infopath/2007/PartnerControls">
+  <documentManagement>
+    <Thema xmlns="75a7cc16-a325-42f6-a633-b9d335f46d66" xsi:nil="true"/>
+    <TaxCatchAll xmlns="19ceceb8-c9f0-4d85-b02f-4af4389ce7fe" xsi:nil="true"/>
+    <lcf76f155ced4ddcb4097134ff3c332f xmlns="75a7cc16-a325-42f6-a633-b9d335f46d66">
+      <Terms xmlns="http://schemas.microsoft.com/office/infopath/2007/PartnerControls"/>
+    </lcf76f155ced4ddcb4097134ff3c332f>
+  </documentManagement>
+</p:properties>
 </file>
 
-<file path=customXml/itemProps3.xml><?xml version="1.0" encoding="utf-8"?>
+<file path=customXml/itemProps1.xml><?xml version="1.0" encoding="utf-8"?>
 <ds:datastoreItem xmlns:ds="http://schemas.openxmlformats.org/officeDocument/2006/customXml" ds:itemID="{29A50926-DF36-4E48-AEF9-9947AD1C4EB5}">
   <ds:schemaRefs>
     <ds:schemaRef ds:uri="http://schemas.microsoft.com/office/2006/metadata/contentType"/>
@@ -4734,4 +4887,23 @@
     <ds:schemaRef ds:uri="http://schemas.microsoft.com/internal/obd"/>
   </ds:schemaRefs>
 </ds:datastoreItem>
+</file>
+
+<file path=customXml/itemProps2.xml><?xml version="1.0" encoding="utf-8"?>
+<ds:datastoreItem xmlns:ds="http://schemas.openxmlformats.org/officeDocument/2006/customXml" ds:itemID="{2904A126-324B-49D2-9297-D489D6A59BE7}">
+  <ds:schemaRefs>
+    <ds:schemaRef ds:uri="http://schemas.microsoft.com/sharepoint/v3/contenttype/forms"/>
+  </ds:schemaRefs>
+</ds:datastoreItem>
+</file>
+
+<file path=customXml/itemProps3.xml><?xml version="1.0" encoding="utf-8"?>
+<ds:datastoreItem xmlns:ds="http://schemas.openxmlformats.org/officeDocument/2006/customXml" ds:itemID="{21F2C082-E4E9-48CA-A881-0E9B6B53FBD2}">
+  <ds:schemaRefs>
+    <ds:schemaRef ds:uri="http://schemas.microsoft.com/office/2006/metadata/properties"/>
+    <ds:schemaRef ds:uri="http://schemas.microsoft.com/office/infopath/2007/PartnerControls"/>
+    <ds:schemaRef ds:uri="75a7cc16-a325-42f6-a633-b9d335f46d66"/>
+    <ds:schemaRef ds:uri="19ceceb8-c9f0-4d85-b02f-4af4389ce7fe"/>
+  </ds:schemaRefs>
+</ds:datastoreItem>
 </file>
--- a/presentation/Science_day_HSRM/fig/!abb.pptx
+++ b/presentation/Science_day_HSRM/fig/!abb.pptx
@@ -118,17 +118,25 @@
 <pc:chgInfo xmlns:a="http://schemas.openxmlformats.org/drawingml/2006/main" xmlns:r="http://schemas.openxmlformats.org/officeDocument/2006/relationships" xmlns:ac="http://schemas.microsoft.com/office/drawing/2013/main/command" xmlns:pc="http://schemas.microsoft.com/office/powerpoint/2013/main/command">
   <pc:docChgLst>
     <pc:chgData name="Kirschstein, Thomas" userId="919c7545-f9ae-4451-a4d1-28753b1796cc" providerId="ADAL" clId="{8178FA0C-3989-435F-A6B7-56D41B4E769F}"/>
-    <pc:docChg chg="addSld modSld">
-      <pc:chgData name="Kirschstein, Thomas" userId="919c7545-f9ae-4451-a4d1-28753b1796cc" providerId="ADAL" clId="{8178FA0C-3989-435F-A6B7-56D41B4E769F}" dt="2026-06-11T18:12:09.905" v="172" actId="1035"/>
+    <pc:docChg chg="custSel addSld modSld">
+      <pc:chgData name="Kirschstein, Thomas" userId="919c7545-f9ae-4451-a4d1-28753b1796cc" providerId="ADAL" clId="{8178FA0C-3989-435F-A6B7-56D41B4E769F}" dt="2026-06-11T19:08:52.705" v="347" actId="14100"/>
       <pc:docMkLst>
         <pc:docMk/>
       </pc:docMkLst>
       <pc:sldChg chg="addSp delSp modSp new mod">
-        <pc:chgData name="Kirschstein, Thomas" userId="919c7545-f9ae-4451-a4d1-28753b1796cc" providerId="ADAL" clId="{8178FA0C-3989-435F-A6B7-56D41B4E769F}" dt="2026-06-11T18:12:09.905" v="172" actId="1035"/>
+        <pc:chgData name="Kirschstein, Thomas" userId="919c7545-f9ae-4451-a4d1-28753b1796cc" providerId="ADAL" clId="{8178FA0C-3989-435F-A6B7-56D41B4E769F}" dt="2026-06-11T19:08:52.705" v="347" actId="14100"/>
         <pc:sldMkLst>
           <pc:docMk/>
           <pc:sldMk cId="364873397" sldId="258"/>
         </pc:sldMkLst>
+        <pc:spChg chg="del">
+          <ac:chgData name="Kirschstein, Thomas" userId="919c7545-f9ae-4451-a4d1-28753b1796cc" providerId="ADAL" clId="{8178FA0C-3989-435F-A6B7-56D41B4E769F}" dt="2026-06-11T19:06:04.304" v="306" actId="478"/>
+          <ac:spMkLst>
+            <pc:docMk/>
+            <pc:sldMk cId="364873397" sldId="258"/>
+            <ac:spMk id="2" creationId="{3DB87BAB-0E93-42C6-39F4-2371EC6B662F}"/>
+          </ac:spMkLst>
+        </pc:spChg>
         <pc:spChg chg="del">
           <ac:chgData name="Kirschstein, Thomas" userId="919c7545-f9ae-4451-a4d1-28753b1796cc" providerId="ADAL" clId="{8178FA0C-3989-435F-A6B7-56D41B4E769F}" dt="2026-06-11T18:10:47.435" v="7"/>
           <ac:spMkLst>
@@ -137,8 +145,16 @@
             <ac:spMk id="3" creationId="{433CBF3A-B2BC-4F38-3AF6-D6ADD56F7001}"/>
           </ac:spMkLst>
         </pc:spChg>
+        <pc:spChg chg="add mod ord">
+          <ac:chgData name="Kirschstein, Thomas" userId="919c7545-f9ae-4451-a4d1-28753b1796cc" providerId="ADAL" clId="{8178FA0C-3989-435F-A6B7-56D41B4E769F}" dt="2026-06-11T19:04:28.410" v="225" actId="2085"/>
+          <ac:spMkLst>
+            <pc:docMk/>
+            <pc:sldMk cId="364873397" sldId="258"/>
+            <ac:spMk id="10" creationId="{0FD9DA4F-8992-1CBC-F7B7-0F4C74403AEF}"/>
+          </ac:spMkLst>
+        </pc:spChg>
         <pc:picChg chg="add mod ord">
-          <ac:chgData name="Kirschstein, Thomas" userId="919c7545-f9ae-4451-a4d1-28753b1796cc" providerId="ADAL" clId="{8178FA0C-3989-435F-A6B7-56D41B4E769F}" dt="2026-06-11T18:12:09.905" v="172" actId="1035"/>
+          <ac:chgData name="Kirschstein, Thomas" userId="919c7545-f9ae-4451-a4d1-28753b1796cc" providerId="ADAL" clId="{8178FA0C-3989-435F-A6B7-56D41B4E769F}" dt="2026-06-11T19:08:52.705" v="347" actId="14100"/>
           <ac:picMkLst>
             <pc:docMk/>
             <pc:sldMk cId="364873397" sldId="258"/>
@@ -146,7 +162,7 @@
           </ac:picMkLst>
         </pc:picChg>
         <pc:picChg chg="add mod">
-          <ac:chgData name="Kirschstein, Thomas" userId="919c7545-f9ae-4451-a4d1-28753b1796cc" providerId="ADAL" clId="{8178FA0C-3989-435F-A6B7-56D41B4E769F}" dt="2026-06-11T18:11:59.171" v="167" actId="14100"/>
+          <ac:chgData name="Kirschstein, Thomas" userId="919c7545-f9ae-4451-a4d1-28753b1796cc" providerId="ADAL" clId="{8178FA0C-3989-435F-A6B7-56D41B4E769F}" dt="2026-06-11T19:08:52.705" v="347" actId="14100"/>
           <ac:picMkLst>
             <pc:docMk/>
             <pc:sldMk cId="364873397" sldId="258"/>
@@ -154,7 +170,7 @@
           </ac:picMkLst>
         </pc:picChg>
         <pc:picChg chg="add mod">
-          <ac:chgData name="Kirschstein, Thomas" userId="919c7545-f9ae-4451-a4d1-28753b1796cc" providerId="ADAL" clId="{8178FA0C-3989-435F-A6B7-56D41B4E769F}" dt="2026-06-11T18:11:42.244" v="98" actId="14100"/>
+          <ac:chgData name="Kirschstein, Thomas" userId="919c7545-f9ae-4451-a4d1-28753b1796cc" providerId="ADAL" clId="{8178FA0C-3989-435F-A6B7-56D41B4E769F}" dt="2026-06-11T19:08:52.705" v="347" actId="14100"/>
           <ac:picMkLst>
             <pc:docMk/>
             <pc:sldMk cId="364873397" sldId="258"/>
@@ -4179,25 +4195,50 @@
       </p:grpSpPr>
       <p:sp>
         <p:nvSpPr>
-          <p:cNvPr id="2" name="Titel 1">
-            <a:extLst>
-              <a:ext uri="{FF2B5EF4-FFF2-40B4-BE49-F238E27FC236}">
-                <a16:creationId xmlns:a16="http://schemas.microsoft.com/office/drawing/2014/main" id="{3DB87BAB-0E93-42C6-39F4-2371EC6B662F}"/>
-              </a:ext>
-            </a:extLst>
-          </p:cNvPr>
-          <p:cNvSpPr>
-            <a:spLocks noGrp="1"/>
-          </p:cNvSpPr>
-          <p:nvPr>
-            <p:ph type="title"/>
-          </p:nvPr>
-        </p:nvSpPr>
-        <p:spPr/>
-        <p:txBody>
-          <a:bodyPr/>
-          <a:lstStyle/>
-          <a:p>
+          <p:cNvPr id="10" name="Rechteck 9">
+            <a:extLst>
+              <a:ext uri="{FF2B5EF4-FFF2-40B4-BE49-F238E27FC236}">
+                <a16:creationId xmlns:a16="http://schemas.microsoft.com/office/drawing/2014/main" id="{0FD9DA4F-8992-1CBC-F7B7-0F4C74403AEF}"/>
+              </a:ext>
+            </a:extLst>
+          </p:cNvPr>
+          <p:cNvSpPr/>
+          <p:nvPr/>
+        </p:nvSpPr>
+        <p:spPr>
+          <a:xfrm>
+            <a:off x="207169" y="100013"/>
+            <a:ext cx="11822906" cy="6593681"/>
+          </a:xfrm>
+          <a:prstGeom prst="rect">
+            <a:avLst/>
+          </a:prstGeom>
+          <a:noFill/>
+          <a:ln>
+            <a:noFill/>
+          </a:ln>
+        </p:spPr>
+        <p:style>
+          <a:lnRef idx="2">
+            <a:schemeClr val="accent1">
+              <a:shade val="15000"/>
+            </a:schemeClr>
+          </a:lnRef>
+          <a:fillRef idx="1">
+            <a:schemeClr val="accent1"/>
+          </a:fillRef>
+          <a:effectRef idx="0">
+            <a:schemeClr val="accent1"/>
+          </a:effectRef>
+          <a:fontRef idx="minor">
+            <a:schemeClr val="lt1"/>
+          </a:fontRef>
+        </p:style>
+        <p:txBody>
+          <a:bodyPr rtlCol="0" anchor="ctr"/>
+          <a:lstStyle/>
+          <a:p>
+            <a:pPr algn="ctr"/>
             <a:endParaRPr lang="de-DE"/>
           </a:p>
         </p:txBody>
@@ -4232,8 +4273,8 @@
         </p:blipFill>
         <p:spPr>
           <a:xfrm>
-            <a:off x="925512" y="2362235"/>
-            <a:ext cx="3267075" cy="1400175"/>
+            <a:off x="1204123" y="469131"/>
+            <a:ext cx="2530886" cy="1084665"/>
           </a:xfrm>
           <a:prstGeom prst="rect">
             <a:avLst/>
@@ -4268,8 +4309,8 @@
         </p:blipFill>
         <p:spPr>
           <a:xfrm>
-            <a:off x="5174460" y="2138363"/>
-            <a:ext cx="3019422" cy="1759706"/>
+            <a:off x="5088735" y="373847"/>
+            <a:ext cx="2237479" cy="1303993"/>
           </a:xfrm>
           <a:prstGeom prst="rect">
             <a:avLst/>
@@ -4304,8 +4345,8 @@
         </p:blipFill>
         <p:spPr>
           <a:xfrm>
-            <a:off x="8310563" y="2138617"/>
-            <a:ext cx="2380302" cy="1869348"/>
+            <a:off x="8224838" y="265167"/>
+            <a:ext cx="1776412" cy="1395089"/>
           </a:xfrm>
           <a:prstGeom prst="rect">
             <a:avLst/>
